--- a/edities/books34-v3/books/book-4/chapters/4.3/paragraph-pdfs/4.3.2 Arbeidsaanbod, participatie en evenwicht – presentatie.pptx
+++ b/edities/books34-v3/books/book-4/chapters/4.3/paragraph-pdfs/4.3.2 Arbeidsaanbod, participatie en evenwicht – presentatie.pptx
@@ -515,19 +515,19 @@
           <a:p xmlns:a="http://schemas.openxmlformats.org/drawingml/2006/main">
             <a:r>
               <a:rPr sz="1400"/>
-              <a:t>Bron: Boek 4, editie books34-v3, gedrukte complete-boekpagina 124, 128–130. https://github.com/meijer1973/4veco-lessen/blob/e734532a42b27732ac25ce990fc9448b12309d28/edities/books34-v3/books/book-4/output/Boek_4_Compleet_v3.pdf</a:t>
-            </a:r>
-          </a:p>
-          <a:p xmlns:a="http://schemas.openxmlformats.org/drawingml/2006/main">
-            <a:r>
-              <a:rPr sz="1400"/>
-              <a:t>Methode en opgaven: https://github.com/meijer1973/4veco-lessen/blob/e734532a42b27732ac25ce990fc9448b12309d28/edities/books34-v3/books/book-4/chapters/4.3/4.3.2%20manuscript.md</a:t>
-            </a:r>
-          </a:p>
-          <a:p xmlns:a="http://schemas.openxmlformats.org/drawingml/2006/main">
-            <a:r>
-              <a:rPr sz="1400"/>
-              <a:t>Antwoorden: https://github.com/meijer1973/4veco-lessen/blob/e734532a42b27732ac25ce990fc9448b12309d28/edities/books34-v3/books/book-4/chapters/4.3/Antwoorden.md</a:t>
+              <a:t>Bron: Boek 4, editie books34-v3, gedrukte complete-boekpagina 124, 128–130. https://github.com/meijer1973/4veco-lessen/blob/0356afb6cac2dd43adbe9f63b872aaf423efc914/edities/books34-v3/books/book-4/output/Boek_4_Compleet_v3.pdf</a:t>
+            </a:r>
+          </a:p>
+          <a:p xmlns:a="http://schemas.openxmlformats.org/drawingml/2006/main">
+            <a:r>
+              <a:rPr sz="1400"/>
+              <a:t>Methode en opgaven: https://github.com/meijer1973/4veco-lessen/blob/0356afb6cac2dd43adbe9f63b872aaf423efc914/edities/books34-v3/books/book-4/chapters/4.3/4.3.2%20manuscript.md</a:t>
+            </a:r>
+          </a:p>
+          <a:p xmlns:a="http://schemas.openxmlformats.org/drawingml/2006/main">
+            <a:r>
+              <a:rPr sz="1400"/>
+              <a:t>Antwoorden: https://github.com/meijer1973/4veco-lessen/blob/0356afb6cac2dd43adbe9f63b872aaf423efc914/edities/books34-v3/books/book-4/chapters/4.3/Antwoorden.md</a:t>
             </a:r>
           </a:p>
           <a:p xmlns:a="http://schemas.openxmlformats.org/drawingml/2006/main">
@@ -652,19 +652,19 @@
           <a:p xmlns:a="http://schemas.openxmlformats.org/drawingml/2006/main">
             <a:r>
               <a:rPr sz="1400"/>
-              <a:t>Bron: Boek 4, editie books34-v3, gedrukte complete-boekpagina 125–126. https://github.com/meijer1973/4veco-lessen/blob/e734532a42b27732ac25ce990fc9448b12309d28/edities/books34-v3/books/book-4/output/Boek_4_Compleet_v3.pdf</a:t>
-            </a:r>
-          </a:p>
-          <a:p xmlns:a="http://schemas.openxmlformats.org/drawingml/2006/main">
-            <a:r>
-              <a:rPr sz="1400"/>
-              <a:t>Methode en opgaven: https://github.com/meijer1973/4veco-lessen/blob/e734532a42b27732ac25ce990fc9448b12309d28/edities/books34-v3/books/book-4/chapters/4.3/4.3.2%20manuscript.md</a:t>
-            </a:r>
-          </a:p>
-          <a:p xmlns:a="http://schemas.openxmlformats.org/drawingml/2006/main">
-            <a:r>
-              <a:rPr sz="1400"/>
-              <a:t>Antwoorden: https://github.com/meijer1973/4veco-lessen/blob/e734532a42b27732ac25ce990fc9448b12309d28/edities/books34-v3/books/book-4/chapters/4.3/Antwoorden.md</a:t>
+              <a:t>Bron: Boek 4, editie books34-v3, gedrukte complete-boekpagina 125–126. https://github.com/meijer1973/4veco-lessen/blob/0356afb6cac2dd43adbe9f63b872aaf423efc914/edities/books34-v3/books/book-4/output/Boek_4_Compleet_v3.pdf</a:t>
+            </a:r>
+          </a:p>
+          <a:p xmlns:a="http://schemas.openxmlformats.org/drawingml/2006/main">
+            <a:r>
+              <a:rPr sz="1400"/>
+              <a:t>Methode en opgaven: https://github.com/meijer1973/4veco-lessen/blob/0356afb6cac2dd43adbe9f63b872aaf423efc914/edities/books34-v3/books/book-4/chapters/4.3/4.3.2%20manuscript.md</a:t>
+            </a:r>
+          </a:p>
+          <a:p xmlns:a="http://schemas.openxmlformats.org/drawingml/2006/main">
+            <a:r>
+              <a:rPr sz="1400"/>
+              <a:t>Antwoorden: https://github.com/meijer1973/4veco-lessen/blob/0356afb6cac2dd43adbe9f63b872aaf423efc914/edities/books34-v3/books/book-4/chapters/4.3/Antwoorden.md</a:t>
             </a:r>
           </a:p>
           <a:p xmlns:a="http://schemas.openxmlformats.org/drawingml/2006/main">
@@ -789,19 +789,19 @@
           <a:p xmlns:a="http://schemas.openxmlformats.org/drawingml/2006/main">
             <a:r>
               <a:rPr sz="1400"/>
-              <a:t>Bron: Boek 4, editie books34-v3, gedrukte complete-boekpagina 126–127. https://github.com/meijer1973/4veco-lessen/blob/e734532a42b27732ac25ce990fc9448b12309d28/edities/books34-v3/books/book-4/output/Boek_4_Compleet_v3.pdf</a:t>
-            </a:r>
-          </a:p>
-          <a:p xmlns:a="http://schemas.openxmlformats.org/drawingml/2006/main">
-            <a:r>
-              <a:rPr sz="1400"/>
-              <a:t>Methode en opgaven: https://github.com/meijer1973/4veco-lessen/blob/e734532a42b27732ac25ce990fc9448b12309d28/edities/books34-v3/books/book-4/chapters/4.3/4.3.2%20manuscript.md</a:t>
-            </a:r>
-          </a:p>
-          <a:p xmlns:a="http://schemas.openxmlformats.org/drawingml/2006/main">
-            <a:r>
-              <a:rPr sz="1400"/>
-              <a:t>Antwoorden: https://github.com/meijer1973/4veco-lessen/blob/e734532a42b27732ac25ce990fc9448b12309d28/edities/books34-v3/books/book-4/chapters/4.3/Antwoorden.md</a:t>
+              <a:t>Bron: Boek 4, editie books34-v3, gedrukte complete-boekpagina 126–127. https://github.com/meijer1973/4veco-lessen/blob/0356afb6cac2dd43adbe9f63b872aaf423efc914/edities/books34-v3/books/book-4/output/Boek_4_Compleet_v3.pdf</a:t>
+            </a:r>
+          </a:p>
+          <a:p xmlns:a="http://schemas.openxmlformats.org/drawingml/2006/main">
+            <a:r>
+              <a:rPr sz="1400"/>
+              <a:t>Methode en opgaven: https://github.com/meijer1973/4veco-lessen/blob/0356afb6cac2dd43adbe9f63b872aaf423efc914/edities/books34-v3/books/book-4/chapters/4.3/4.3.2%20manuscript.md</a:t>
+            </a:r>
+          </a:p>
+          <a:p xmlns:a="http://schemas.openxmlformats.org/drawingml/2006/main">
+            <a:r>
+              <a:rPr sz="1400"/>
+              <a:t>Antwoorden: https://github.com/meijer1973/4veco-lessen/blob/0356afb6cac2dd43adbe9f63b872aaf423efc914/edities/books34-v3/books/book-4/chapters/4.3/Antwoorden.md</a:t>
             </a:r>
           </a:p>
           <a:p xmlns:a="http://schemas.openxmlformats.org/drawingml/2006/main">
@@ -926,19 +926,19 @@
           <a:p xmlns:a="http://schemas.openxmlformats.org/drawingml/2006/main">
             <a:r>
               <a:rPr sz="1400"/>
-              <a:t>Bron: Boek 4, editie books34-v3, gedrukte complete-boekpagina 126–127. https://github.com/meijer1973/4veco-lessen/blob/e734532a42b27732ac25ce990fc9448b12309d28/edities/books34-v3/books/book-4/output/Boek_4_Compleet_v3.pdf</a:t>
-            </a:r>
-          </a:p>
-          <a:p xmlns:a="http://schemas.openxmlformats.org/drawingml/2006/main">
-            <a:r>
-              <a:rPr sz="1400"/>
-              <a:t>Methode en opgaven: https://github.com/meijer1973/4veco-lessen/blob/e734532a42b27732ac25ce990fc9448b12309d28/edities/books34-v3/books/book-4/chapters/4.3/4.3.2%20manuscript.md</a:t>
-            </a:r>
-          </a:p>
-          <a:p xmlns:a="http://schemas.openxmlformats.org/drawingml/2006/main">
-            <a:r>
-              <a:rPr sz="1400"/>
-              <a:t>Antwoorden: https://github.com/meijer1973/4veco-lessen/blob/e734532a42b27732ac25ce990fc9448b12309d28/edities/books34-v3/books/book-4/chapters/4.3/Antwoorden.md</a:t>
+              <a:t>Bron: Boek 4, editie books34-v3, gedrukte complete-boekpagina 126–127. https://github.com/meijer1973/4veco-lessen/blob/0356afb6cac2dd43adbe9f63b872aaf423efc914/edities/books34-v3/books/book-4/output/Boek_4_Compleet_v3.pdf</a:t>
+            </a:r>
+          </a:p>
+          <a:p xmlns:a="http://schemas.openxmlformats.org/drawingml/2006/main">
+            <a:r>
+              <a:rPr sz="1400"/>
+              <a:t>Methode en opgaven: https://github.com/meijer1973/4veco-lessen/blob/0356afb6cac2dd43adbe9f63b872aaf423efc914/edities/books34-v3/books/book-4/chapters/4.3/4.3.2%20manuscript.md</a:t>
+            </a:r>
+          </a:p>
+          <a:p xmlns:a="http://schemas.openxmlformats.org/drawingml/2006/main">
+            <a:r>
+              <a:rPr sz="1400"/>
+              <a:t>Antwoorden: https://github.com/meijer1973/4veco-lessen/blob/0356afb6cac2dd43adbe9f63b872aaf423efc914/edities/books34-v3/books/book-4/chapters/4.3/Antwoorden.md</a:t>
             </a:r>
           </a:p>
           <a:p xmlns:a="http://schemas.openxmlformats.org/drawingml/2006/main">
@@ -1063,19 +1063,19 @@
           <a:p xmlns:a="http://schemas.openxmlformats.org/drawingml/2006/main">
             <a:r>
               <a:rPr sz="1400"/>
-              <a:t>Bron: Boek 4, editie books34-v3, gedrukte complete-boekpagina 125–127. https://github.com/meijer1973/4veco-lessen/blob/e734532a42b27732ac25ce990fc9448b12309d28/edities/books34-v3/books/book-4/output/Boek_4_Compleet_v3.pdf</a:t>
-            </a:r>
-          </a:p>
-          <a:p xmlns:a="http://schemas.openxmlformats.org/drawingml/2006/main">
-            <a:r>
-              <a:rPr sz="1400"/>
-              <a:t>Methode en opgaven: https://github.com/meijer1973/4veco-lessen/blob/e734532a42b27732ac25ce990fc9448b12309d28/edities/books34-v3/books/book-4/chapters/4.3/4.3.2%20manuscript.md</a:t>
-            </a:r>
-          </a:p>
-          <a:p xmlns:a="http://schemas.openxmlformats.org/drawingml/2006/main">
-            <a:r>
-              <a:rPr sz="1400"/>
-              <a:t>Antwoorden: https://github.com/meijer1973/4veco-lessen/blob/e734532a42b27732ac25ce990fc9448b12309d28/edities/books34-v3/books/book-4/chapters/4.3/Antwoorden.md</a:t>
+              <a:t>Bron: Boek 4, editie books34-v3, gedrukte complete-boekpagina 125–127. https://github.com/meijer1973/4veco-lessen/blob/0356afb6cac2dd43adbe9f63b872aaf423efc914/edities/books34-v3/books/book-4/output/Boek_4_Compleet_v3.pdf</a:t>
+            </a:r>
+          </a:p>
+          <a:p xmlns:a="http://schemas.openxmlformats.org/drawingml/2006/main">
+            <a:r>
+              <a:rPr sz="1400"/>
+              <a:t>Methode en opgaven: https://github.com/meijer1973/4veco-lessen/blob/0356afb6cac2dd43adbe9f63b872aaf423efc914/edities/books34-v3/books/book-4/chapters/4.3/4.3.2%20manuscript.md</a:t>
+            </a:r>
+          </a:p>
+          <a:p xmlns:a="http://schemas.openxmlformats.org/drawingml/2006/main">
+            <a:r>
+              <a:rPr sz="1400"/>
+              <a:t>Antwoorden: https://github.com/meijer1973/4veco-lessen/blob/0356afb6cac2dd43adbe9f63b872aaf423efc914/edities/books34-v3/books/book-4/chapters/4.3/Antwoorden.md</a:t>
             </a:r>
           </a:p>
           <a:p xmlns:a="http://schemas.openxmlformats.org/drawingml/2006/main">
@@ -1200,19 +1200,19 @@
           <a:p xmlns:a="http://schemas.openxmlformats.org/drawingml/2006/main">
             <a:r>
               <a:rPr sz="1400"/>
-              <a:t>Bron: Boek 4, editie books34-v3, gedrukte complete-boekpagina 124–127. https://github.com/meijer1973/4veco-lessen/blob/e734532a42b27732ac25ce990fc9448b12309d28/edities/books34-v3/books/book-4/output/Boek_4_Compleet_v3.pdf</a:t>
-            </a:r>
-          </a:p>
-          <a:p xmlns:a="http://schemas.openxmlformats.org/drawingml/2006/main">
-            <a:r>
-              <a:rPr sz="1400"/>
-              <a:t>Methode en opgaven: https://github.com/meijer1973/4veco-lessen/blob/e734532a42b27732ac25ce990fc9448b12309d28/edities/books34-v3/books/book-4/chapters/4.3/4.3.2%20manuscript.md</a:t>
-            </a:r>
-          </a:p>
-          <a:p xmlns:a="http://schemas.openxmlformats.org/drawingml/2006/main">
-            <a:r>
-              <a:rPr sz="1400"/>
-              <a:t>Antwoorden: https://github.com/meijer1973/4veco-lessen/blob/e734532a42b27732ac25ce990fc9448b12309d28/edities/books34-v3/books/book-4/chapters/4.3/Antwoorden.md</a:t>
+              <a:t>Bron: Boek 4, editie books34-v3, gedrukte complete-boekpagina 124–127. https://github.com/meijer1973/4veco-lessen/blob/0356afb6cac2dd43adbe9f63b872aaf423efc914/edities/books34-v3/books/book-4/output/Boek_4_Compleet_v3.pdf</a:t>
+            </a:r>
+          </a:p>
+          <a:p xmlns:a="http://schemas.openxmlformats.org/drawingml/2006/main">
+            <a:r>
+              <a:rPr sz="1400"/>
+              <a:t>Methode en opgaven: https://github.com/meijer1973/4veco-lessen/blob/0356afb6cac2dd43adbe9f63b872aaf423efc914/edities/books34-v3/books/book-4/chapters/4.3/4.3.2%20manuscript.md</a:t>
+            </a:r>
+          </a:p>
+          <a:p xmlns:a="http://schemas.openxmlformats.org/drawingml/2006/main">
+            <a:r>
+              <a:rPr sz="1400"/>
+              <a:t>Antwoorden: https://github.com/meijer1973/4veco-lessen/blob/0356afb6cac2dd43adbe9f63b872aaf423efc914/edities/books34-v3/books/book-4/chapters/4.3/Antwoorden.md</a:t>
             </a:r>
           </a:p>
           <a:p xmlns:a="http://schemas.openxmlformats.org/drawingml/2006/main">
@@ -1337,19 +1337,19 @@
           <a:p xmlns:a="http://schemas.openxmlformats.org/drawingml/2006/main">
             <a:r>
               <a:rPr sz="1400"/>
-              <a:t>Bron: Boek 4, editie books34-v3, gedrukte complete-boekpagina 124, 128–130. https://github.com/meijer1973/4veco-lessen/blob/e734532a42b27732ac25ce990fc9448b12309d28/edities/books34-v3/books/book-4/output/Boek_4_Compleet_v3.pdf</a:t>
-            </a:r>
-          </a:p>
-          <a:p xmlns:a="http://schemas.openxmlformats.org/drawingml/2006/main">
-            <a:r>
-              <a:rPr sz="1400"/>
-              <a:t>Methode en opgaven: https://github.com/meijer1973/4veco-lessen/blob/e734532a42b27732ac25ce990fc9448b12309d28/edities/books34-v3/books/book-4/chapters/4.3/4.3.2%20manuscript.md</a:t>
-            </a:r>
-          </a:p>
-          <a:p xmlns:a="http://schemas.openxmlformats.org/drawingml/2006/main">
-            <a:r>
-              <a:rPr sz="1400"/>
-              <a:t>Antwoorden: https://github.com/meijer1973/4veco-lessen/blob/e734532a42b27732ac25ce990fc9448b12309d28/edities/books34-v3/books/book-4/chapters/4.3/Antwoorden.md</a:t>
+              <a:t>Bron: Boek 4, editie books34-v3, gedrukte complete-boekpagina 124, 128–130. https://github.com/meijer1973/4veco-lessen/blob/0356afb6cac2dd43adbe9f63b872aaf423efc914/edities/books34-v3/books/book-4/output/Boek_4_Compleet_v3.pdf</a:t>
+            </a:r>
+          </a:p>
+          <a:p xmlns:a="http://schemas.openxmlformats.org/drawingml/2006/main">
+            <a:r>
+              <a:rPr sz="1400"/>
+              <a:t>Methode en opgaven: https://github.com/meijer1973/4veco-lessen/blob/0356afb6cac2dd43adbe9f63b872aaf423efc914/edities/books34-v3/books/book-4/chapters/4.3/4.3.2%20manuscript.md</a:t>
+            </a:r>
+          </a:p>
+          <a:p xmlns:a="http://schemas.openxmlformats.org/drawingml/2006/main">
+            <a:r>
+              <a:rPr sz="1400"/>
+              <a:t>Antwoorden: https://github.com/meijer1973/4veco-lessen/blob/0356afb6cac2dd43adbe9f63b872aaf423efc914/edities/books34-v3/books/book-4/chapters/4.3/Antwoorden.md</a:t>
             </a:r>
           </a:p>
           <a:p xmlns:a="http://schemas.openxmlformats.org/drawingml/2006/main">
@@ -1474,19 +1474,19 @@
           <a:p xmlns:a="http://schemas.openxmlformats.org/drawingml/2006/main">
             <a:r>
               <a:rPr sz="1400"/>
-              <a:t>Bron: Boek 4, editie books34-v3, gedrukte complete-boekpagina 130. https://github.com/meijer1973/4veco-lessen/blob/e734532a42b27732ac25ce990fc9448b12309d28/edities/books34-v3/books/book-4/output/Boek_4_Compleet_v3.pdf</a:t>
-            </a:r>
-          </a:p>
-          <a:p xmlns:a="http://schemas.openxmlformats.org/drawingml/2006/main">
-            <a:r>
-              <a:rPr sz="1400"/>
-              <a:t>Methode en opgaven: https://github.com/meijer1973/4veco-lessen/blob/e734532a42b27732ac25ce990fc9448b12309d28/edities/books34-v3/books/book-4/chapters/4.3/4.3.2%20manuscript.md</a:t>
-            </a:r>
-          </a:p>
-          <a:p xmlns:a="http://schemas.openxmlformats.org/drawingml/2006/main">
-            <a:r>
-              <a:rPr sz="1400"/>
-              <a:t>Antwoorden: https://github.com/meijer1973/4veco-lessen/blob/e734532a42b27732ac25ce990fc9448b12309d28/edities/books34-v3/books/book-4/chapters/4.3/Antwoorden.md</a:t>
+              <a:t>Bron: Boek 4, editie books34-v3, gedrukte complete-boekpagina 130. https://github.com/meijer1973/4veco-lessen/blob/0356afb6cac2dd43adbe9f63b872aaf423efc914/edities/books34-v3/books/book-4/output/Boek_4_Compleet_v3.pdf</a:t>
+            </a:r>
+          </a:p>
+          <a:p xmlns:a="http://schemas.openxmlformats.org/drawingml/2006/main">
+            <a:r>
+              <a:rPr sz="1400"/>
+              <a:t>Methode en opgaven: https://github.com/meijer1973/4veco-lessen/blob/0356afb6cac2dd43adbe9f63b872aaf423efc914/edities/books34-v3/books/book-4/chapters/4.3/4.3.2%20manuscript.md</a:t>
+            </a:r>
+          </a:p>
+          <a:p xmlns:a="http://schemas.openxmlformats.org/drawingml/2006/main">
+            <a:r>
+              <a:rPr sz="1400"/>
+              <a:t>Antwoorden: https://github.com/meijer1973/4veco-lessen/blob/0356afb6cac2dd43adbe9f63b872aaf423efc914/edities/books34-v3/books/book-4/chapters/4.3/Antwoorden.md</a:t>
             </a:r>
           </a:p>
           <a:p xmlns:a="http://schemas.openxmlformats.org/drawingml/2006/main">
@@ -1611,19 +1611,19 @@
           <a:p xmlns:a="http://schemas.openxmlformats.org/drawingml/2006/main">
             <a:r>
               <a:rPr sz="1400"/>
-              <a:t>Bron: Boek 4, editie books34-v3, gedrukte complete-boekpagina 130. https://github.com/meijer1973/4veco-lessen/blob/e734532a42b27732ac25ce990fc9448b12309d28/edities/books34-v3/books/book-4/output/Boek_4_Compleet_v3.pdf</a:t>
-            </a:r>
-          </a:p>
-          <a:p xmlns:a="http://schemas.openxmlformats.org/drawingml/2006/main">
-            <a:r>
-              <a:rPr sz="1400"/>
-              <a:t>Methode en opgaven: https://github.com/meijer1973/4veco-lessen/blob/e734532a42b27732ac25ce990fc9448b12309d28/edities/books34-v3/books/book-4/chapters/4.3/4.3.2%20manuscript.md</a:t>
-            </a:r>
-          </a:p>
-          <a:p xmlns:a="http://schemas.openxmlformats.org/drawingml/2006/main">
-            <a:r>
-              <a:rPr sz="1400"/>
-              <a:t>Antwoorden: https://github.com/meijer1973/4veco-lessen/blob/e734532a42b27732ac25ce990fc9448b12309d28/edities/books34-v3/books/book-4/chapters/4.3/Antwoorden.md</a:t>
+              <a:t>Bron: Boek 4, editie books34-v3, gedrukte complete-boekpagina 130. https://github.com/meijer1973/4veco-lessen/blob/0356afb6cac2dd43adbe9f63b872aaf423efc914/edities/books34-v3/books/book-4/output/Boek_4_Compleet_v3.pdf</a:t>
+            </a:r>
+          </a:p>
+          <a:p xmlns:a="http://schemas.openxmlformats.org/drawingml/2006/main">
+            <a:r>
+              <a:rPr sz="1400"/>
+              <a:t>Methode en opgaven: https://github.com/meijer1973/4veco-lessen/blob/0356afb6cac2dd43adbe9f63b872aaf423efc914/edities/books34-v3/books/book-4/chapters/4.3/4.3.2%20manuscript.md</a:t>
+            </a:r>
+          </a:p>
+          <a:p xmlns:a="http://schemas.openxmlformats.org/drawingml/2006/main">
+            <a:r>
+              <a:rPr sz="1400"/>
+              <a:t>Antwoorden: https://github.com/meijer1973/4veco-lessen/blob/0356afb6cac2dd43adbe9f63b872aaf423efc914/edities/books34-v3/books/book-4/chapters/4.3/Antwoorden.md</a:t>
             </a:r>
           </a:p>
           <a:p xmlns:a="http://schemas.openxmlformats.org/drawingml/2006/main">
@@ -1748,19 +1748,19 @@
           <a:p xmlns:a="http://schemas.openxmlformats.org/drawingml/2006/main">
             <a:r>
               <a:rPr sz="1400"/>
-              <a:t>Bron: Boek 4, editie books34-v3, gedrukte complete-boekpagina 130. https://github.com/meijer1973/4veco-lessen/blob/e734532a42b27732ac25ce990fc9448b12309d28/edities/books34-v3/books/book-4/output/Boek_4_Compleet_v3.pdf</a:t>
-            </a:r>
-          </a:p>
-          <a:p xmlns:a="http://schemas.openxmlformats.org/drawingml/2006/main">
-            <a:r>
-              <a:rPr sz="1400"/>
-              <a:t>Methode en opgaven: https://github.com/meijer1973/4veco-lessen/blob/e734532a42b27732ac25ce990fc9448b12309d28/edities/books34-v3/books/book-4/chapters/4.3/4.3.2%20manuscript.md</a:t>
-            </a:r>
-          </a:p>
-          <a:p xmlns:a="http://schemas.openxmlformats.org/drawingml/2006/main">
-            <a:r>
-              <a:rPr sz="1400"/>
-              <a:t>Antwoorden: https://github.com/meijer1973/4veco-lessen/blob/e734532a42b27732ac25ce990fc9448b12309d28/edities/books34-v3/books/book-4/chapters/4.3/Antwoorden.md</a:t>
+              <a:t>Bron: Boek 4, editie books34-v3, gedrukte complete-boekpagina 130. https://github.com/meijer1973/4veco-lessen/blob/0356afb6cac2dd43adbe9f63b872aaf423efc914/edities/books34-v3/books/book-4/output/Boek_4_Compleet_v3.pdf</a:t>
+            </a:r>
+          </a:p>
+          <a:p xmlns:a="http://schemas.openxmlformats.org/drawingml/2006/main">
+            <a:r>
+              <a:rPr sz="1400"/>
+              <a:t>Methode en opgaven: https://github.com/meijer1973/4veco-lessen/blob/0356afb6cac2dd43adbe9f63b872aaf423efc914/edities/books34-v3/books/book-4/chapters/4.3/4.3.2%20manuscript.md</a:t>
+            </a:r>
+          </a:p>
+          <a:p xmlns:a="http://schemas.openxmlformats.org/drawingml/2006/main">
+            <a:r>
+              <a:rPr sz="1400"/>
+              <a:t>Antwoorden: https://github.com/meijer1973/4veco-lessen/blob/0356afb6cac2dd43adbe9f63b872aaf423efc914/edities/books34-v3/books/book-4/chapters/4.3/Antwoorden.md</a:t>
             </a:r>
           </a:p>
           <a:p xmlns:a="http://schemas.openxmlformats.org/drawingml/2006/main">
@@ -1849,7 +1849,7 @@
           <a:p xmlns:a="http://schemas.openxmlformats.org/drawingml/2006/main">
             <a:r>
               <a:rPr sz="1400"/>
-              <a:t>Uitleg: Basisgrafiek bij de volledige opgave 16. Dezelfde functies, eenheden en assenschaal als de boekfiguur. De getekende lijnstukken zijn begrensd op het expliciete geldigheidsgebied uit bronB. De boekfiguur trekt de lijnen daarbuiten door; gebruik uitsluitend 4≤w≤24. Dit verandert geen brongegeven of gevraagde bewerking. Laat het berekende punt en hulplijnen eerst door leerlingen aanwijzen, zonder oplossing te tonen.</a:t>
+              <a:t>Uitleg: Basisgrafiek bij de volledige opgave 16. Dezelfde functies, eenheden en assenschaal als de boekfiguur. De getekende lijnstukken zijn begrensd op het expliciete geldigheidsgebied uit bronB. De boekfiguur en deze presentatie gebruiken uitsluitend het geldige bereik 4≤w≤24. Dit verandert geen brongegeven of gevraagde bewerking. Laat het berekende punt en hulplijnen eerst door leerlingen aanwijzen, zonder oplossing te tonen.</a:t>
             </a:r>
           </a:p>
           <a:p xmlns:a="http://schemas.openxmlformats.org/drawingml/2006/main">
@@ -1885,19 +1885,19 @@
           <a:p xmlns:a="http://schemas.openxmlformats.org/drawingml/2006/main">
             <a:r>
               <a:rPr sz="1400"/>
-              <a:t>Bron: Boek 4, editie books34-v3, gedrukte complete-boekpagina 130. https://github.com/meijer1973/4veco-lessen/blob/e734532a42b27732ac25ce990fc9448b12309d28/edities/books34-v3/books/book-4/output/Boek_4_Compleet_v3.pdf</a:t>
-            </a:r>
-          </a:p>
-          <a:p xmlns:a="http://schemas.openxmlformats.org/drawingml/2006/main">
-            <a:r>
-              <a:rPr sz="1400"/>
-              <a:t>Methode en opgaven: https://github.com/meijer1973/4veco-lessen/blob/e734532a42b27732ac25ce990fc9448b12309d28/edities/books34-v3/books/book-4/chapters/4.3/4.3.2%20manuscript.md</a:t>
-            </a:r>
-          </a:p>
-          <a:p xmlns:a="http://schemas.openxmlformats.org/drawingml/2006/main">
-            <a:r>
-              <a:rPr sz="1400"/>
-              <a:t>Antwoorden: https://github.com/meijer1973/4veco-lessen/blob/e734532a42b27732ac25ce990fc9448b12309d28/edities/books34-v3/books/book-4/chapters/4.3/Antwoorden.md</a:t>
+              <a:t>Bron: Boek 4, editie books34-v3, gedrukte complete-boekpagina 130. https://github.com/meijer1973/4veco-lessen/blob/0356afb6cac2dd43adbe9f63b872aaf423efc914/edities/books34-v3/books/book-4/output/Boek_4_Compleet_v3.pdf</a:t>
+            </a:r>
+          </a:p>
+          <a:p xmlns:a="http://schemas.openxmlformats.org/drawingml/2006/main">
+            <a:r>
+              <a:rPr sz="1400"/>
+              <a:t>Methode en opgaven: https://github.com/meijer1973/4veco-lessen/blob/0356afb6cac2dd43adbe9f63b872aaf423efc914/edities/books34-v3/books/book-4/chapters/4.3/4.3.2%20manuscript.md</a:t>
+            </a:r>
+          </a:p>
+          <a:p xmlns:a="http://schemas.openxmlformats.org/drawingml/2006/main">
+            <a:r>
+              <a:rPr sz="1400"/>
+              <a:t>Antwoorden: https://github.com/meijer1973/4veco-lessen/blob/0356afb6cac2dd43adbe9f63b872aaf423efc914/edities/books34-v3/books/book-4/chapters/4.3/Antwoorden.md</a:t>
             </a:r>
           </a:p>
           <a:p xmlns:a="http://schemas.openxmlformats.org/drawingml/2006/main">
@@ -2022,19 +2022,19 @@
           <a:p xmlns:a="http://schemas.openxmlformats.org/drawingml/2006/main">
             <a:r>
               <a:rPr sz="1400"/>
-              <a:t>Bron: Boek 4, editie books34-v3, gedrukte complete-boekpagina 124–127. https://github.com/meijer1973/4veco-lessen/blob/e734532a42b27732ac25ce990fc9448b12309d28/edities/books34-v3/books/book-4/output/Boek_4_Compleet_v3.pdf</a:t>
-            </a:r>
-          </a:p>
-          <a:p xmlns:a="http://schemas.openxmlformats.org/drawingml/2006/main">
-            <a:r>
-              <a:rPr sz="1400"/>
-              <a:t>Methode en opgaven: https://github.com/meijer1973/4veco-lessen/blob/e734532a42b27732ac25ce990fc9448b12309d28/edities/books34-v3/books/book-4/chapters/4.3/4.3.2%20manuscript.md</a:t>
-            </a:r>
-          </a:p>
-          <a:p xmlns:a="http://schemas.openxmlformats.org/drawingml/2006/main">
-            <a:r>
-              <a:rPr sz="1400"/>
-              <a:t>Antwoorden: https://github.com/meijer1973/4veco-lessen/blob/e734532a42b27732ac25ce990fc9448b12309d28/edities/books34-v3/books/book-4/chapters/4.3/Antwoorden.md</a:t>
+              <a:t>Bron: Boek 4, editie books34-v3, gedrukte complete-boekpagina 124–127. https://github.com/meijer1973/4veco-lessen/blob/0356afb6cac2dd43adbe9f63b872aaf423efc914/edities/books34-v3/books/book-4/output/Boek_4_Compleet_v3.pdf</a:t>
+            </a:r>
+          </a:p>
+          <a:p xmlns:a="http://schemas.openxmlformats.org/drawingml/2006/main">
+            <a:r>
+              <a:rPr sz="1400"/>
+              <a:t>Methode en opgaven: https://github.com/meijer1973/4veco-lessen/blob/0356afb6cac2dd43adbe9f63b872aaf423efc914/edities/books34-v3/books/book-4/chapters/4.3/4.3.2%20manuscript.md</a:t>
+            </a:r>
+          </a:p>
+          <a:p xmlns:a="http://schemas.openxmlformats.org/drawingml/2006/main">
+            <a:r>
+              <a:rPr sz="1400"/>
+              <a:t>Antwoorden: https://github.com/meijer1973/4veco-lessen/blob/0356afb6cac2dd43adbe9f63b872aaf423efc914/edities/books34-v3/books/book-4/chapters/4.3/Antwoorden.md</a:t>
             </a:r>
           </a:p>
           <a:p xmlns:a="http://schemas.openxmlformats.org/drawingml/2006/main">
@@ -2159,19 +2159,19 @@
           <a:p xmlns:a="http://schemas.openxmlformats.org/drawingml/2006/main">
             <a:r>
               <a:rPr sz="1400"/>
-              <a:t>Bron: Boek 4, editie books34-v3, gedrukte complete-boekpagina 130. https://github.com/meijer1973/4veco-lessen/blob/e734532a42b27732ac25ce990fc9448b12309d28/edities/books34-v3/books/book-4/output/Boek_4_Compleet_v3.pdf</a:t>
-            </a:r>
-          </a:p>
-          <a:p xmlns:a="http://schemas.openxmlformats.org/drawingml/2006/main">
-            <a:r>
-              <a:rPr sz="1400"/>
-              <a:t>Methode en opgaven: https://github.com/meijer1973/4veco-lessen/blob/e734532a42b27732ac25ce990fc9448b12309d28/edities/books34-v3/books/book-4/chapters/4.3/4.3.2%20manuscript.md</a:t>
-            </a:r>
-          </a:p>
-          <a:p xmlns:a="http://schemas.openxmlformats.org/drawingml/2006/main">
-            <a:r>
-              <a:rPr sz="1400"/>
-              <a:t>Antwoorden: https://github.com/meijer1973/4veco-lessen/blob/e734532a42b27732ac25ce990fc9448b12309d28/edities/books34-v3/books/book-4/chapters/4.3/Antwoorden.md</a:t>
+              <a:t>Bron: Boek 4, editie books34-v3, gedrukte complete-boekpagina 130. https://github.com/meijer1973/4veco-lessen/blob/0356afb6cac2dd43adbe9f63b872aaf423efc914/edities/books34-v3/books/book-4/output/Boek_4_Compleet_v3.pdf</a:t>
+            </a:r>
+          </a:p>
+          <a:p xmlns:a="http://schemas.openxmlformats.org/drawingml/2006/main">
+            <a:r>
+              <a:rPr sz="1400"/>
+              <a:t>Methode en opgaven: https://github.com/meijer1973/4veco-lessen/blob/0356afb6cac2dd43adbe9f63b872aaf423efc914/edities/books34-v3/books/book-4/chapters/4.3/4.3.2%20manuscript.md</a:t>
+            </a:r>
+          </a:p>
+          <a:p xmlns:a="http://schemas.openxmlformats.org/drawingml/2006/main">
+            <a:r>
+              <a:rPr sz="1400"/>
+              <a:t>Antwoorden: https://github.com/meijer1973/4veco-lessen/blob/0356afb6cac2dd43adbe9f63b872aaf423efc914/edities/books34-v3/books/book-4/chapters/4.3/Antwoorden.md</a:t>
             </a:r>
           </a:p>
           <a:p xmlns:a="http://schemas.openxmlformats.org/drawingml/2006/main">
@@ -2296,19 +2296,19 @@
           <a:p xmlns:a="http://schemas.openxmlformats.org/drawingml/2006/main">
             <a:r>
               <a:rPr sz="1400"/>
-              <a:t>Bron: Boek 4, editie books34-v3, gedrukte complete-boekpagina 130. https://github.com/meijer1973/4veco-lessen/blob/e734532a42b27732ac25ce990fc9448b12309d28/edities/books34-v3/books/book-4/output/Boek_4_Compleet_v3.pdf</a:t>
-            </a:r>
-          </a:p>
-          <a:p xmlns:a="http://schemas.openxmlformats.org/drawingml/2006/main">
-            <a:r>
-              <a:rPr sz="1400"/>
-              <a:t>Methode en opgaven: https://github.com/meijer1973/4veco-lessen/blob/e734532a42b27732ac25ce990fc9448b12309d28/edities/books34-v3/books/book-4/chapters/4.3/4.3.2%20manuscript.md</a:t>
-            </a:r>
-          </a:p>
-          <a:p xmlns:a="http://schemas.openxmlformats.org/drawingml/2006/main">
-            <a:r>
-              <a:rPr sz="1400"/>
-              <a:t>Antwoorden: https://github.com/meijer1973/4veco-lessen/blob/e734532a42b27732ac25ce990fc9448b12309d28/edities/books34-v3/books/book-4/chapters/4.3/Antwoorden.md</a:t>
+              <a:t>Bron: Boek 4, editie books34-v3, gedrukte complete-boekpagina 130. https://github.com/meijer1973/4veco-lessen/blob/0356afb6cac2dd43adbe9f63b872aaf423efc914/edities/books34-v3/books/book-4/output/Boek_4_Compleet_v3.pdf</a:t>
+            </a:r>
+          </a:p>
+          <a:p xmlns:a="http://schemas.openxmlformats.org/drawingml/2006/main">
+            <a:r>
+              <a:rPr sz="1400"/>
+              <a:t>Methode en opgaven: https://github.com/meijer1973/4veco-lessen/blob/0356afb6cac2dd43adbe9f63b872aaf423efc914/edities/books34-v3/books/book-4/chapters/4.3/4.3.2%20manuscript.md</a:t>
+            </a:r>
+          </a:p>
+          <a:p xmlns:a="http://schemas.openxmlformats.org/drawingml/2006/main">
+            <a:r>
+              <a:rPr sz="1400"/>
+              <a:t>Antwoorden: https://github.com/meijer1973/4veco-lessen/blob/0356afb6cac2dd43adbe9f63b872aaf423efc914/edities/books34-v3/books/book-4/chapters/4.3/Antwoorden.md</a:t>
             </a:r>
           </a:p>
           <a:p xmlns:a="http://schemas.openxmlformats.org/drawingml/2006/main">
@@ -2433,19 +2433,19 @@
           <a:p xmlns:a="http://schemas.openxmlformats.org/drawingml/2006/main">
             <a:r>
               <a:rPr sz="1400"/>
-              <a:t>Bron: Boek 4, editie books34-v3, gedrukte complete-boekpagina 130. https://github.com/meijer1973/4veco-lessen/blob/e734532a42b27732ac25ce990fc9448b12309d28/edities/books34-v3/books/book-4/output/Boek_4_Compleet_v3.pdf</a:t>
-            </a:r>
-          </a:p>
-          <a:p xmlns:a="http://schemas.openxmlformats.org/drawingml/2006/main">
-            <a:r>
-              <a:rPr sz="1400"/>
-              <a:t>Methode en opgaven: https://github.com/meijer1973/4veco-lessen/blob/e734532a42b27732ac25ce990fc9448b12309d28/edities/books34-v3/books/book-4/chapters/4.3/4.3.2%20manuscript.md</a:t>
-            </a:r>
-          </a:p>
-          <a:p xmlns:a="http://schemas.openxmlformats.org/drawingml/2006/main">
-            <a:r>
-              <a:rPr sz="1400"/>
-              <a:t>Antwoorden: https://github.com/meijer1973/4veco-lessen/blob/e734532a42b27732ac25ce990fc9448b12309d28/edities/books34-v3/books/book-4/chapters/4.3/Antwoorden.md</a:t>
+              <a:t>Bron: Boek 4, editie books34-v3, gedrukte complete-boekpagina 130. https://github.com/meijer1973/4veco-lessen/blob/0356afb6cac2dd43adbe9f63b872aaf423efc914/edities/books34-v3/books/book-4/output/Boek_4_Compleet_v3.pdf</a:t>
+            </a:r>
+          </a:p>
+          <a:p xmlns:a="http://schemas.openxmlformats.org/drawingml/2006/main">
+            <a:r>
+              <a:rPr sz="1400"/>
+              <a:t>Methode en opgaven: https://github.com/meijer1973/4veco-lessen/blob/0356afb6cac2dd43adbe9f63b872aaf423efc914/edities/books34-v3/books/book-4/chapters/4.3/4.3.2%20manuscript.md</a:t>
+            </a:r>
+          </a:p>
+          <a:p xmlns:a="http://schemas.openxmlformats.org/drawingml/2006/main">
+            <a:r>
+              <a:rPr sz="1400"/>
+              <a:t>Antwoorden: https://github.com/meijer1973/4veco-lessen/blob/0356afb6cac2dd43adbe9f63b872aaf423efc914/edities/books34-v3/books/book-4/chapters/4.3/Antwoorden.md</a:t>
             </a:r>
           </a:p>
           <a:p xmlns:a="http://schemas.openxmlformats.org/drawingml/2006/main">
@@ -2570,19 +2570,19 @@
           <a:p xmlns:a="http://schemas.openxmlformats.org/drawingml/2006/main">
             <a:r>
               <a:rPr sz="1400"/>
-              <a:t>Bron: Boek 4, editie books34-v3, gedrukte complete-boekpagina 130. https://github.com/meijer1973/4veco-lessen/blob/e734532a42b27732ac25ce990fc9448b12309d28/edities/books34-v3/books/book-4/output/Boek_4_Compleet_v3.pdf</a:t>
-            </a:r>
-          </a:p>
-          <a:p xmlns:a="http://schemas.openxmlformats.org/drawingml/2006/main">
-            <a:r>
-              <a:rPr sz="1400"/>
-              <a:t>Methode en opgaven: https://github.com/meijer1973/4veco-lessen/blob/e734532a42b27732ac25ce990fc9448b12309d28/edities/books34-v3/books/book-4/chapters/4.3/4.3.2%20manuscript.md</a:t>
-            </a:r>
-          </a:p>
-          <a:p xmlns:a="http://schemas.openxmlformats.org/drawingml/2006/main">
-            <a:r>
-              <a:rPr sz="1400"/>
-              <a:t>Antwoorden: https://github.com/meijer1973/4veco-lessen/blob/e734532a42b27732ac25ce990fc9448b12309d28/edities/books34-v3/books/book-4/chapters/4.3/Antwoorden.md</a:t>
+              <a:t>Bron: Boek 4, editie books34-v3, gedrukte complete-boekpagina 130. https://github.com/meijer1973/4veco-lessen/blob/0356afb6cac2dd43adbe9f63b872aaf423efc914/edities/books34-v3/books/book-4/output/Boek_4_Compleet_v3.pdf</a:t>
+            </a:r>
+          </a:p>
+          <a:p xmlns:a="http://schemas.openxmlformats.org/drawingml/2006/main">
+            <a:r>
+              <a:rPr sz="1400"/>
+              <a:t>Methode en opgaven: https://github.com/meijer1973/4veco-lessen/blob/0356afb6cac2dd43adbe9f63b872aaf423efc914/edities/books34-v3/books/book-4/chapters/4.3/4.3.2%20manuscript.md</a:t>
+            </a:r>
+          </a:p>
+          <a:p xmlns:a="http://schemas.openxmlformats.org/drawingml/2006/main">
+            <a:r>
+              <a:rPr sz="1400"/>
+              <a:t>Antwoorden: https://github.com/meijer1973/4veco-lessen/blob/0356afb6cac2dd43adbe9f63b872aaf423efc914/edities/books34-v3/books/book-4/chapters/4.3/Antwoorden.md</a:t>
             </a:r>
           </a:p>
           <a:p xmlns:a="http://schemas.openxmlformats.org/drawingml/2006/main">
@@ -2707,19 +2707,19 @@
           <a:p xmlns:a="http://schemas.openxmlformats.org/drawingml/2006/main">
             <a:r>
               <a:rPr sz="1400"/>
-              <a:t>Bron: Boek 4, editie books34-v3, gedrukte complete-boekpagina 130. https://github.com/meijer1973/4veco-lessen/blob/e734532a42b27732ac25ce990fc9448b12309d28/edities/books34-v3/books/book-4/output/Boek_4_Compleet_v3.pdf</a:t>
-            </a:r>
-          </a:p>
-          <a:p xmlns:a="http://schemas.openxmlformats.org/drawingml/2006/main">
-            <a:r>
-              <a:rPr sz="1400"/>
-              <a:t>Methode en opgaven: https://github.com/meijer1973/4veco-lessen/blob/e734532a42b27732ac25ce990fc9448b12309d28/edities/books34-v3/books/book-4/chapters/4.3/4.3.2%20manuscript.md</a:t>
-            </a:r>
-          </a:p>
-          <a:p xmlns:a="http://schemas.openxmlformats.org/drawingml/2006/main">
-            <a:r>
-              <a:rPr sz="1400"/>
-              <a:t>Antwoorden: https://github.com/meijer1973/4veco-lessen/blob/e734532a42b27732ac25ce990fc9448b12309d28/edities/books34-v3/books/book-4/chapters/4.3/Antwoorden.md</a:t>
+              <a:t>Bron: Boek 4, editie books34-v3, gedrukte complete-boekpagina 130. https://github.com/meijer1973/4veco-lessen/blob/0356afb6cac2dd43adbe9f63b872aaf423efc914/edities/books34-v3/books/book-4/output/Boek_4_Compleet_v3.pdf</a:t>
+            </a:r>
+          </a:p>
+          <a:p xmlns:a="http://schemas.openxmlformats.org/drawingml/2006/main">
+            <a:r>
+              <a:rPr sz="1400"/>
+              <a:t>Methode en opgaven: https://github.com/meijer1973/4veco-lessen/blob/0356afb6cac2dd43adbe9f63b872aaf423efc914/edities/books34-v3/books/book-4/chapters/4.3/4.3.2%20manuscript.md</a:t>
+            </a:r>
+          </a:p>
+          <a:p xmlns:a="http://schemas.openxmlformats.org/drawingml/2006/main">
+            <a:r>
+              <a:rPr sz="1400"/>
+              <a:t>Antwoorden: https://github.com/meijer1973/4veco-lessen/blob/0356afb6cac2dd43adbe9f63b872aaf423efc914/edities/books34-v3/books/book-4/chapters/4.3/Antwoorden.md</a:t>
             </a:r>
           </a:p>
           <a:p xmlns:a="http://schemas.openxmlformats.org/drawingml/2006/main">
@@ -2844,19 +2844,19 @@
           <a:p xmlns:a="http://schemas.openxmlformats.org/drawingml/2006/main">
             <a:r>
               <a:rPr sz="1400"/>
-              <a:t>Bron: Boek 4, editie books34-v3, gedrukte complete-boekpagina 124, 128–130. https://github.com/meijer1973/4veco-lessen/blob/e734532a42b27732ac25ce990fc9448b12309d28/edities/books34-v3/books/book-4/output/Boek_4_Compleet_v3.pdf</a:t>
-            </a:r>
-          </a:p>
-          <a:p xmlns:a="http://schemas.openxmlformats.org/drawingml/2006/main">
-            <a:r>
-              <a:rPr sz="1400"/>
-              <a:t>Methode en opgaven: https://github.com/meijer1973/4veco-lessen/blob/e734532a42b27732ac25ce990fc9448b12309d28/edities/books34-v3/books/book-4/chapters/4.3/4.3.2%20manuscript.md</a:t>
-            </a:r>
-          </a:p>
-          <a:p xmlns:a="http://schemas.openxmlformats.org/drawingml/2006/main">
-            <a:r>
-              <a:rPr sz="1400"/>
-              <a:t>Antwoorden: https://github.com/meijer1973/4veco-lessen/blob/e734532a42b27732ac25ce990fc9448b12309d28/edities/books34-v3/books/book-4/chapters/4.3/Antwoorden.md</a:t>
+              <a:t>Bron: Boek 4, editie books34-v3, gedrukte complete-boekpagina 124, 128–130. https://github.com/meijer1973/4veco-lessen/blob/0356afb6cac2dd43adbe9f63b872aaf423efc914/edities/books34-v3/books/book-4/output/Boek_4_Compleet_v3.pdf</a:t>
+            </a:r>
+          </a:p>
+          <a:p xmlns:a="http://schemas.openxmlformats.org/drawingml/2006/main">
+            <a:r>
+              <a:rPr sz="1400"/>
+              <a:t>Methode en opgaven: https://github.com/meijer1973/4veco-lessen/blob/0356afb6cac2dd43adbe9f63b872aaf423efc914/edities/books34-v3/books/book-4/chapters/4.3/4.3.2%20manuscript.md</a:t>
+            </a:r>
+          </a:p>
+          <a:p xmlns:a="http://schemas.openxmlformats.org/drawingml/2006/main">
+            <a:r>
+              <a:rPr sz="1400"/>
+              <a:t>Antwoorden: https://github.com/meijer1973/4veco-lessen/blob/0356afb6cac2dd43adbe9f63b872aaf423efc914/edities/books34-v3/books/book-4/chapters/4.3/Antwoorden.md</a:t>
             </a:r>
           </a:p>
           <a:p xmlns:a="http://schemas.openxmlformats.org/drawingml/2006/main">
@@ -2981,19 +2981,19 @@
           <a:p xmlns:a="http://schemas.openxmlformats.org/drawingml/2006/main">
             <a:r>
               <a:rPr sz="1400"/>
-              <a:t>Bron: Boek 4, editie books34-v3, gedrukte complete-boekpagina 124. https://github.com/meijer1973/4veco-lessen/blob/e734532a42b27732ac25ce990fc9448b12309d28/edities/books34-v3/books/book-4/output/Boek_4_Compleet_v3.pdf</a:t>
-            </a:r>
-          </a:p>
-          <a:p xmlns:a="http://schemas.openxmlformats.org/drawingml/2006/main">
-            <a:r>
-              <a:rPr sz="1400"/>
-              <a:t>Methode en opgaven: https://github.com/meijer1973/4veco-lessen/blob/e734532a42b27732ac25ce990fc9448b12309d28/edities/books34-v3/books/book-4/chapters/4.3/4.3.2%20manuscript.md</a:t>
-            </a:r>
-          </a:p>
-          <a:p xmlns:a="http://schemas.openxmlformats.org/drawingml/2006/main">
-            <a:r>
-              <a:rPr sz="1400"/>
-              <a:t>Antwoorden: https://github.com/meijer1973/4veco-lessen/blob/e734532a42b27732ac25ce990fc9448b12309d28/edities/books34-v3/books/book-4/chapters/4.3/Antwoorden.md</a:t>
+              <a:t>Bron: Boek 4, editie books34-v3, gedrukte complete-boekpagina 124. https://github.com/meijer1973/4veco-lessen/blob/0356afb6cac2dd43adbe9f63b872aaf423efc914/edities/books34-v3/books/book-4/output/Boek_4_Compleet_v3.pdf</a:t>
+            </a:r>
+          </a:p>
+          <a:p xmlns:a="http://schemas.openxmlformats.org/drawingml/2006/main">
+            <a:r>
+              <a:rPr sz="1400"/>
+              <a:t>Methode en opgaven: https://github.com/meijer1973/4veco-lessen/blob/0356afb6cac2dd43adbe9f63b872aaf423efc914/edities/books34-v3/books/book-4/chapters/4.3/4.3.2%20manuscript.md</a:t>
+            </a:r>
+          </a:p>
+          <a:p xmlns:a="http://schemas.openxmlformats.org/drawingml/2006/main">
+            <a:r>
+              <a:rPr sz="1400"/>
+              <a:t>Antwoorden: https://github.com/meijer1973/4veco-lessen/blob/0356afb6cac2dd43adbe9f63b872aaf423efc914/edities/books34-v3/books/book-4/chapters/4.3/Antwoorden.md</a:t>
             </a:r>
           </a:p>
           <a:p xmlns:a="http://schemas.openxmlformats.org/drawingml/2006/main">
@@ -3118,19 +3118,19 @@
           <a:p xmlns:a="http://schemas.openxmlformats.org/drawingml/2006/main">
             <a:r>
               <a:rPr sz="1400"/>
-              <a:t>Bron: Boek 4, editie books34-v3, gedrukte complete-boekpagina 124–125. https://github.com/meijer1973/4veco-lessen/blob/e734532a42b27732ac25ce990fc9448b12309d28/edities/books34-v3/books/book-4/output/Boek_4_Compleet_v3.pdf</a:t>
-            </a:r>
-          </a:p>
-          <a:p xmlns:a="http://schemas.openxmlformats.org/drawingml/2006/main">
-            <a:r>
-              <a:rPr sz="1400"/>
-              <a:t>Methode en opgaven: https://github.com/meijer1973/4veco-lessen/blob/e734532a42b27732ac25ce990fc9448b12309d28/edities/books34-v3/books/book-4/chapters/4.3/4.3.2%20manuscript.md</a:t>
-            </a:r>
-          </a:p>
-          <a:p xmlns:a="http://schemas.openxmlformats.org/drawingml/2006/main">
-            <a:r>
-              <a:rPr sz="1400"/>
-              <a:t>Antwoorden: https://github.com/meijer1973/4veco-lessen/blob/e734532a42b27732ac25ce990fc9448b12309d28/edities/books34-v3/books/book-4/chapters/4.3/Antwoorden.md</a:t>
+              <a:t>Bron: Boek 4, editie books34-v3, gedrukte complete-boekpagina 124–125. https://github.com/meijer1973/4veco-lessen/blob/0356afb6cac2dd43adbe9f63b872aaf423efc914/edities/books34-v3/books/book-4/output/Boek_4_Compleet_v3.pdf</a:t>
+            </a:r>
+          </a:p>
+          <a:p xmlns:a="http://schemas.openxmlformats.org/drawingml/2006/main">
+            <a:r>
+              <a:rPr sz="1400"/>
+              <a:t>Methode en opgaven: https://github.com/meijer1973/4veco-lessen/blob/0356afb6cac2dd43adbe9f63b872aaf423efc914/edities/books34-v3/books/book-4/chapters/4.3/4.3.2%20manuscript.md</a:t>
+            </a:r>
+          </a:p>
+          <a:p xmlns:a="http://schemas.openxmlformats.org/drawingml/2006/main">
+            <a:r>
+              <a:rPr sz="1400"/>
+              <a:t>Antwoorden: https://github.com/meijer1973/4veco-lessen/blob/0356afb6cac2dd43adbe9f63b872aaf423efc914/edities/books34-v3/books/book-4/chapters/4.3/Antwoorden.md</a:t>
             </a:r>
           </a:p>
           <a:p xmlns:a="http://schemas.openxmlformats.org/drawingml/2006/main">
@@ -3255,19 +3255,19 @@
           <a:p xmlns:a="http://schemas.openxmlformats.org/drawingml/2006/main">
             <a:r>
               <a:rPr sz="1400"/>
-              <a:t>Bron: Boek 4, editie books34-v3, gedrukte complete-boekpagina 125. https://github.com/meijer1973/4veco-lessen/blob/e734532a42b27732ac25ce990fc9448b12309d28/edities/books34-v3/books/book-4/output/Boek_4_Compleet_v3.pdf</a:t>
-            </a:r>
-          </a:p>
-          <a:p xmlns:a="http://schemas.openxmlformats.org/drawingml/2006/main">
-            <a:r>
-              <a:rPr sz="1400"/>
-              <a:t>Methode en opgaven: https://github.com/meijer1973/4veco-lessen/blob/e734532a42b27732ac25ce990fc9448b12309d28/edities/books34-v3/books/book-4/chapters/4.3/4.3.2%20manuscript.md</a:t>
-            </a:r>
-          </a:p>
-          <a:p xmlns:a="http://schemas.openxmlformats.org/drawingml/2006/main">
-            <a:r>
-              <a:rPr sz="1400"/>
-              <a:t>Antwoorden: https://github.com/meijer1973/4veco-lessen/blob/e734532a42b27732ac25ce990fc9448b12309d28/edities/books34-v3/books/book-4/chapters/4.3/Antwoorden.md</a:t>
+              <a:t>Bron: Boek 4, editie books34-v3, gedrukte complete-boekpagina 125. https://github.com/meijer1973/4veco-lessen/blob/0356afb6cac2dd43adbe9f63b872aaf423efc914/edities/books34-v3/books/book-4/output/Boek_4_Compleet_v3.pdf</a:t>
+            </a:r>
+          </a:p>
+          <a:p xmlns:a="http://schemas.openxmlformats.org/drawingml/2006/main">
+            <a:r>
+              <a:rPr sz="1400"/>
+              <a:t>Methode en opgaven: https://github.com/meijer1973/4veco-lessen/blob/0356afb6cac2dd43adbe9f63b872aaf423efc914/edities/books34-v3/books/book-4/chapters/4.3/4.3.2%20manuscript.md</a:t>
+            </a:r>
+          </a:p>
+          <a:p xmlns:a="http://schemas.openxmlformats.org/drawingml/2006/main">
+            <a:r>
+              <a:rPr sz="1400"/>
+              <a:t>Antwoorden: https://github.com/meijer1973/4veco-lessen/blob/0356afb6cac2dd43adbe9f63b872aaf423efc914/edities/books34-v3/books/book-4/chapters/4.3/Antwoorden.md</a:t>
             </a:r>
           </a:p>
           <a:p xmlns:a="http://schemas.openxmlformats.org/drawingml/2006/main">
@@ -3392,19 +3392,19 @@
           <a:p xmlns:a="http://schemas.openxmlformats.org/drawingml/2006/main">
             <a:r>
               <a:rPr sz="1400"/>
-              <a:t>Bron: Boek 4, editie books34-v3, gedrukte complete-boekpagina 125. https://github.com/meijer1973/4veco-lessen/blob/e734532a42b27732ac25ce990fc9448b12309d28/edities/books34-v3/books/book-4/output/Boek_4_Compleet_v3.pdf</a:t>
-            </a:r>
-          </a:p>
-          <a:p xmlns:a="http://schemas.openxmlformats.org/drawingml/2006/main">
-            <a:r>
-              <a:rPr sz="1400"/>
-              <a:t>Methode en opgaven: https://github.com/meijer1973/4veco-lessen/blob/e734532a42b27732ac25ce990fc9448b12309d28/edities/books34-v3/books/book-4/chapters/4.3/4.3.2%20manuscript.md</a:t>
-            </a:r>
-          </a:p>
-          <a:p xmlns:a="http://schemas.openxmlformats.org/drawingml/2006/main">
-            <a:r>
-              <a:rPr sz="1400"/>
-              <a:t>Antwoorden: https://github.com/meijer1973/4veco-lessen/blob/e734532a42b27732ac25ce990fc9448b12309d28/edities/books34-v3/books/book-4/chapters/4.3/Antwoorden.md</a:t>
+              <a:t>Bron: Boek 4, editie books34-v3, gedrukte complete-boekpagina 125. https://github.com/meijer1973/4veco-lessen/blob/0356afb6cac2dd43adbe9f63b872aaf423efc914/edities/books34-v3/books/book-4/output/Boek_4_Compleet_v3.pdf</a:t>
+            </a:r>
+          </a:p>
+          <a:p xmlns:a="http://schemas.openxmlformats.org/drawingml/2006/main">
+            <a:r>
+              <a:rPr sz="1400"/>
+              <a:t>Methode en opgaven: https://github.com/meijer1973/4veco-lessen/blob/0356afb6cac2dd43adbe9f63b872aaf423efc914/edities/books34-v3/books/book-4/chapters/4.3/4.3.2%20manuscript.md</a:t>
+            </a:r>
+          </a:p>
+          <a:p xmlns:a="http://schemas.openxmlformats.org/drawingml/2006/main">
+            <a:r>
+              <a:rPr sz="1400"/>
+              <a:t>Antwoorden: https://github.com/meijer1973/4veco-lessen/blob/0356afb6cac2dd43adbe9f63b872aaf423efc914/edities/books34-v3/books/book-4/chapters/4.3/Antwoorden.md</a:t>
             </a:r>
           </a:p>
           <a:p xmlns:a="http://schemas.openxmlformats.org/drawingml/2006/main">
@@ -3529,19 +3529,19 @@
           <a:p xmlns:a="http://schemas.openxmlformats.org/drawingml/2006/main">
             <a:r>
               <a:rPr sz="1400"/>
-              <a:t>Bron: Boek 4, editie books34-v3, gedrukte complete-boekpagina 126; voorkennis p.114–115. https://github.com/meijer1973/4veco-lessen/blob/e734532a42b27732ac25ce990fc9448b12309d28/edities/books34-v3/books/book-4/output/Boek_4_Compleet_v3.pdf</a:t>
-            </a:r>
-          </a:p>
-          <a:p xmlns:a="http://schemas.openxmlformats.org/drawingml/2006/main">
-            <a:r>
-              <a:rPr sz="1400"/>
-              <a:t>Methode en opgaven: https://github.com/meijer1973/4veco-lessen/blob/e734532a42b27732ac25ce990fc9448b12309d28/edities/books34-v3/books/book-4/chapters/4.3/4.3.2%20manuscript.md</a:t>
-            </a:r>
-          </a:p>
-          <a:p xmlns:a="http://schemas.openxmlformats.org/drawingml/2006/main">
-            <a:r>
-              <a:rPr sz="1400"/>
-              <a:t>Antwoorden: https://github.com/meijer1973/4veco-lessen/blob/e734532a42b27732ac25ce990fc9448b12309d28/edities/books34-v3/books/book-4/chapters/4.3/Antwoorden.md</a:t>
+              <a:t>Bron: Boek 4, editie books34-v3, gedrukte complete-boekpagina 126; voorkennis p.114–115. https://github.com/meijer1973/4veco-lessen/blob/0356afb6cac2dd43adbe9f63b872aaf423efc914/edities/books34-v3/books/book-4/output/Boek_4_Compleet_v3.pdf</a:t>
+            </a:r>
+          </a:p>
+          <a:p xmlns:a="http://schemas.openxmlformats.org/drawingml/2006/main">
+            <a:r>
+              <a:rPr sz="1400"/>
+              <a:t>Methode en opgaven: https://github.com/meijer1973/4veco-lessen/blob/0356afb6cac2dd43adbe9f63b872aaf423efc914/edities/books34-v3/books/book-4/chapters/4.3/4.3.2%20manuscript.md</a:t>
+            </a:r>
+          </a:p>
+          <a:p xmlns:a="http://schemas.openxmlformats.org/drawingml/2006/main">
+            <a:r>
+              <a:rPr sz="1400"/>
+              <a:t>Antwoorden: https://github.com/meijer1973/4veco-lessen/blob/0356afb6cac2dd43adbe9f63b872aaf423efc914/edities/books34-v3/books/book-4/chapters/4.3/Antwoorden.md</a:t>
             </a:r>
           </a:p>
           <a:p xmlns:a="http://schemas.openxmlformats.org/drawingml/2006/main">
@@ -3666,19 +3666,19 @@
           <a:p xmlns:a="http://schemas.openxmlformats.org/drawingml/2006/main">
             <a:r>
               <a:rPr sz="1400"/>
-              <a:t>Bron: Boek 4, editie books34-v3, gedrukte complete-boekpagina 126–127. https://github.com/meijer1973/4veco-lessen/blob/e734532a42b27732ac25ce990fc9448b12309d28/edities/books34-v3/books/book-4/output/Boek_4_Compleet_v3.pdf</a:t>
-            </a:r>
-          </a:p>
-          <a:p xmlns:a="http://schemas.openxmlformats.org/drawingml/2006/main">
-            <a:r>
-              <a:rPr sz="1400"/>
-              <a:t>Methode en opgaven: https://github.com/meijer1973/4veco-lessen/blob/e734532a42b27732ac25ce990fc9448b12309d28/edities/books34-v3/books/book-4/chapters/4.3/4.3.2%20manuscript.md</a:t>
-            </a:r>
-          </a:p>
-          <a:p xmlns:a="http://schemas.openxmlformats.org/drawingml/2006/main">
-            <a:r>
-              <a:rPr sz="1400"/>
-              <a:t>Antwoorden: https://github.com/meijer1973/4veco-lessen/blob/e734532a42b27732ac25ce990fc9448b12309d28/edities/books34-v3/books/book-4/chapters/4.3/Antwoorden.md</a:t>
+              <a:t>Bron: Boek 4, editie books34-v3, gedrukte complete-boekpagina 126–127. https://github.com/meijer1973/4veco-lessen/blob/0356afb6cac2dd43adbe9f63b872aaf423efc914/edities/books34-v3/books/book-4/output/Boek_4_Compleet_v3.pdf</a:t>
+            </a:r>
+          </a:p>
+          <a:p xmlns:a="http://schemas.openxmlformats.org/drawingml/2006/main">
+            <a:r>
+              <a:rPr sz="1400"/>
+              <a:t>Methode en opgaven: https://github.com/meijer1973/4veco-lessen/blob/0356afb6cac2dd43adbe9f63b872aaf423efc914/edities/books34-v3/books/book-4/chapters/4.3/4.3.2%20manuscript.md</a:t>
+            </a:r>
+          </a:p>
+          <a:p xmlns:a="http://schemas.openxmlformats.org/drawingml/2006/main">
+            <a:r>
+              <a:rPr sz="1400"/>
+              <a:t>Antwoorden: https://github.com/meijer1973/4veco-lessen/blob/0356afb6cac2dd43adbe9f63b872aaf423efc914/edities/books34-v3/books/book-4/chapters/4.3/Antwoorden.md</a:t>
             </a:r>
           </a:p>
           <a:p xmlns:a="http://schemas.openxmlformats.org/drawingml/2006/main">
@@ -3803,19 +3803,19 @@
           <a:p xmlns:a="http://schemas.openxmlformats.org/drawingml/2006/main">
             <a:r>
               <a:rPr sz="1400"/>
-              <a:t>Bron: Boek 4, editie books34-v3, gedrukte complete-boekpagina 126; voorkennis p.117. https://github.com/meijer1973/4veco-lessen/blob/e734532a42b27732ac25ce990fc9448b12309d28/edities/books34-v3/books/book-4/output/Boek_4_Compleet_v3.pdf</a:t>
-            </a:r>
-          </a:p>
-          <a:p xmlns:a="http://schemas.openxmlformats.org/drawingml/2006/main">
-            <a:r>
-              <a:rPr sz="1400"/>
-              <a:t>Methode en opgaven: https://github.com/meijer1973/4veco-lessen/blob/e734532a42b27732ac25ce990fc9448b12309d28/edities/books34-v3/books/book-4/chapters/4.3/4.3.2%20manuscript.md</a:t>
-            </a:r>
-          </a:p>
-          <a:p xmlns:a="http://schemas.openxmlformats.org/drawingml/2006/main">
-            <a:r>
-              <a:rPr sz="1400"/>
-              <a:t>Antwoorden: https://github.com/meijer1973/4veco-lessen/blob/e734532a42b27732ac25ce990fc9448b12309d28/edities/books34-v3/books/book-4/chapters/4.3/Antwoorden.md</a:t>
+              <a:t>Bron: Boek 4, editie books34-v3, gedrukte complete-boekpagina 126; voorkennis p.117. https://github.com/meijer1973/4veco-lessen/blob/0356afb6cac2dd43adbe9f63b872aaf423efc914/edities/books34-v3/books/book-4/output/Boek_4_Compleet_v3.pdf</a:t>
+            </a:r>
+          </a:p>
+          <a:p xmlns:a="http://schemas.openxmlformats.org/drawingml/2006/main">
+            <a:r>
+              <a:rPr sz="1400"/>
+              <a:t>Methode en opgaven: https://github.com/meijer1973/4veco-lessen/blob/0356afb6cac2dd43adbe9f63b872aaf423efc914/edities/books34-v3/books/book-4/chapters/4.3/4.3.2%20manuscript.md</a:t>
+            </a:r>
+          </a:p>
+          <a:p xmlns:a="http://schemas.openxmlformats.org/drawingml/2006/main">
+            <a:r>
+              <a:rPr sz="1400"/>
+              <a:t>Antwoorden: https://github.com/meijer1973/4veco-lessen/blob/0356afb6cac2dd43adbe9f63b872aaf423efc914/edities/books34-v3/books/book-4/chapters/4.3/Antwoorden.md</a:t>
             </a:r>
           </a:p>
           <a:p xmlns:a="http://schemas.openxmlformats.org/drawingml/2006/main">
